--- a/docs/submission/TALKNFACE_PRODUCT_PITCH_RU.pptx
+++ b/docs/submission/TALKNFACE_PRODUCT_PITCH_RU.pptx
@@ -603,27 +603,22 @@
           <a:lstStyle/>
           <a:p>
             <a:r>
-              <a:t>5:35–6:20. Здесь переходите в живое демо по DEMO_GUIDE_RU.</a:t>
-            </a:r>
-          </a:p>
-          <a:p>
-            <a:r>
-              <a:t>Маршрут: admin → шесть полей supply/planned/normal/friendly/director/margin → проверить → опубликовать → подготовка → логистика → факт → довод → оплата → 95/split/50 → разбор → «Повторить ту же ситуацию».</a:t>
-            </a:r>
-          </a:p>
-          <a:p>
-            <a:r>
-              <a:t>Если демо недоступно: пройдите слайды 3–6 по скриншотам, затем S2 кадр «Цель достигнута».</a:t>
-            </a:r>
-          </a:p>
-          <a:p>
-            <a:r>
-              <a:t>Контактов команды в материалах нет — не выдумывайте имена. Источник — репозиторий владельца.</a:t>
-            </a:r>
-          </a:p>
-          <a:p>
-            <a:r>
-              <a:t>Анонимный GitHub сейчас 404: жюри нужен доступ или ZIP от владельца. QR на localhost нет и не будет.</a:t>
+              <a:t>5:20–5:40, затем живой показ 3–5 минут. Вместе с речью ориентир 8–12 минут. Официальный лимит мероприятия не выдумываем: его проверяет владелец.</a:t>
+            </a:r>
+          </a:p>
+          <a:p>
+            <a:r>
+              <a:t>Живой показ — настроенная плановая поставка, не эталон со слайда 4: дружелюбный тон, доходность, пакет 95 / 40% / 50, затем «Повторить ту же ситуацию». Маршрут в DEMO_GUIDE_RU.</a:t>
+            </a:r>
+          </a:p>
+          <a:p>
+            <a:r>
+              <a:t>Если сервер недоступен: слайды 3, 1, 4 и 6.</a:t>
+            </a:r>
+          </a:p>
+          <a:p>
+            <a:r>
+              <a:t>Контактов команды нет — не выдумывайте. QR нет: публичного адреса нет, localhost в код не кладём.</a:t>
             </a:r>
           </a:p>
         </p:txBody>
@@ -1038,27 +1033,32 @@
           <a:lstStyle/>
           <a:p>
             <a:r>
-              <a:t>1:45–2:35. Это синтетические попытки одной версии S1, не пилот у заказчика.</a:t>
-            </a:r>
-          </a:p>
-          <a:p>
-            <a:r>
-              <a:t>А — маршрут из сценария показа: полезность 64, процесс 100. Источники: DEMO_GUIDE, G5, G6, clean-machine.</a:t>
-            </a:r>
-          </a:p>
-          <a:p>
-            <a:r>
-              <a:t>Б — из таблицы G6: пакет в начале, затем исследование и выход. Соглашения нет, процесс 70. Зачёт «взаимный пакет» остаётся, потому что сделка для этой проверки не нужна.</a:t>
-            </a:r>
-          </a:p>
-          <a:p>
-            <a:r>
-              <a:t>Не говорите, что человек «стал компетентнее на 30 пунктов». Не переводите 64 в рубли.</a:t>
-            </a:r>
-          </a:p>
-          <a:p>
-            <a:r>
-              <a:t>Переход: «Тот же продукт работает и для разговора внутри команды.»</a:t>
+              <a:t>1:45–2:25. Обе попытки — неизменённый эталон S1 «Закупка к запуску»: запуск производства, обычная сложность, нейтральный тон, директор, оборотные средства. Источники: s1-supply-launch.ts, feedback.test.ts, e2e feedback.spec.ts. Это не настроенная плановая поставка живого показа.</a:t>
+            </a:r>
+          </a:p>
+          <a:p>
+            <a:r>
+              <a:t>А: полезность 64, процесс 100.</a:t>
+            </a:r>
+          </a:p>
+          <a:p>
+            <a:r>
+              <a:t>Б: тот же пакет первым, затем вопросы, затем явный выход без сделки. Соглашения нет, процесс 70. Не говорите, что сам порядок вопросов автоматически дал отказ: финал — потому что игрок вышел.</a:t>
+            </a:r>
+          </a:p>
+          <a:p>
+            <a:r>
+              <a:t>Не вычитайте 100 и 70 как рост компетенции. Не переводите 64 в рубли.</a:t>
+            </a:r>
+          </a:p>
+          <a:p>
+            <a:r>
+              <a:t>Живой показ отдельно: плановая поставка, дружелюбный тон, доходность.</a:t>
+            </a:r>
+          </a:p>
+          <a:p>
+            <a:r>
+              <a:t>Переход: «Тот же продукт — и для разговора о нагрузке.»</a:t>
             </a:r>
           </a:p>
         </p:txBody>
@@ -1218,32 +1218,27 @@
           <a:lstStyle/>
           <a:p>
             <a:r>
-              <a:t>3:15–4:00. Покажите разделение: сверху исход сделки, ниже процесс.</a:t>
-            </a:r>
-          </a:p>
-          <a:p>
-            <a:r>
-              <a:t>100: 7 применимых из 12, 5 зачётов прогресса, уступки «нет оценки» — не штраф.</a:t>
-            </a:r>
-          </a:p>
-          <a:p>
-            <a:r>
-              <a:t>44.12 в S2 — формула весов, не «человек на 44%».</a:t>
-            </a:r>
-          </a:p>
-          <a:p>
-            <a:r>
-              <a:t>Недостаточно наблюдений: нет подготовки или мало событий.</a:t>
-            </a:r>
-          </a:p>
-          <a:p>
-            <a:r>
-              <a:t>Ссылка «Ход 5» ведёт к фразе из той попытки, не к шаблону экрана.</a:t>
-            </a:r>
-          </a:p>
-          <a:p>
-            <a:r>
-              <a:t>Переход: «Кому это нужно после хакатона — как гипотеза, не как клиентский кейс.»</a:t>
+              <a:t>3:15–3:55. На экране — фрагмент настоящего разбора: проверка «взаимный пакет», объяснение и ссылка «Ход 5» на сохранённую фразу.</a:t>
+            </a:r>
+          </a:p>
+          <a:p>
+            <a:r>
+              <a:t>100 — 7 применимых проверок из 12, не компетенция человека.</a:t>
+            </a:r>
+          </a:p>
+          <a:p>
+            <a:r>
+              <a:t>44.12 в S2 — веса проверок, не «человек на 44%».</a:t>
+            </a:r>
+          </a:p>
+          <a:p>
+            <a:r>
+              <a:t>«Недостаточно наблюдений» — если нет явной подготовки или мало событий. Второй скриншот для этого не показываем: он был слишком мелким.</a:t>
+            </a:r>
+          </a:p>
+          <a:p>
+            <a:r>
+              <a:t>Переход: «Кому это нужно — как гипотеза, не как клиентский кейс.»</a:t>
             </a:r>
           </a:p>
         </p:txBody>
@@ -1313,27 +1308,27 @@
           <a:lstStyle/>
           <a:p>
             <a:r>
-              <a:t>4:00–4:35. Три роли, три разных обещания.</a:t>
-            </a:r>
-          </a:p>
-          <a:p>
-            <a:r>
-              <a:t>Игрок получает попытки. Организатор — настраиваемую сцену и материал для разговора.</a:t>
-            </a:r>
-          </a:p>
-          <a:p>
-            <a:r>
-              <a:t>Покупатель — сегмент, не выручка. Коммерческая модель и пилот — гипотеза.</a:t>
-            </a:r>
-          </a:p>
-          <a:p>
-            <a:r>
-              <a:t>Не говорите «заменим тренеров» и не называйте ОЭЗ партнёром продукта.</a:t>
-            </a:r>
-          </a:p>
-          <a:p>
-            <a:r>
-              <a:t>Переход: «Почему разбор можно проверять, а не верить модели на слово.»</a:t>
+              <a:t>4:00–4:30. Три роли.</a:t>
+            </a:r>
+          </a:p>
+          <a:p>
+            <a:r>
+              <a:t>Игрок получает свой отчёт. Администратор настраивает и публикует, но не открывает чужие попытки: такого обхода в продукте нет.</a:t>
+            </a:r>
+          </a:p>
+          <a:p>
+            <a:r>
+              <a:t>Наставник смотрит разбор вместе с игроком на его экране. Живого тренера не заменяем.</a:t>
+            </a:r>
+          </a:p>
+          <a:p>
+            <a:r>
+              <a:t>Покупатель — сегмент, не клиент. Алабуга — автор кейса.</a:t>
+            </a:r>
+          </a:p>
+          <a:p>
+            <a:r>
+              <a:t>Переход: «Почему одинаковые ходы дают одинаковый исход.»</a:t>
             </a:r>
           </a:p>
         </p:txBody>
@@ -1403,27 +1398,22 @@
           <a:lstStyle/>
           <a:p>
             <a:r>
-              <a:t>4:35–5:05. Диаграмма, не лекция про миграции.</a:t>
-            </a:r>
-          </a:p>
-          <a:p>
-            <a:r>
-              <a:t>Польза: воспроизводимость и проверяемость. Стек — одна строка.</a:t>
-            </a:r>
-          </a:p>
-          <a:p>
-            <a:r>
-              <a:t>Перезапуск: Stop/Start на том же порту, cookie жива — попытка продолжается. Это измерено на проверенном Windows-ПК, не обещание любой ОС.</a:t>
-            </a:r>
-          </a:p>
-          <a:p>
-            <a:r>
-              <a:t>Доступ: пароль администратора, cookie HttpOnly, чужой UUID не открывает попытку. Публичный HTTPS не делали.</a:t>
-            </a:r>
-          </a:p>
-          <a:p>
-            <a:r>
-              <a:t>Переход: «Что уже можно показать жюри и что честно ещё впереди.»</a:t>
+              <a:t>4:30–4:55. Три шага: экран, правила, сохранённый разбор.</a:t>
+            </a:r>
+          </a:p>
+          <a:p>
+            <a:r>
+              <a:t>Польза для человека: исход можно проверить по ходу.</a:t>
+            </a:r>
+          </a:p>
+          <a:p>
+            <a:r>
+              <a:t>Стек — одна строка. Локальный запуск, не сайт. Перезапуск с сохранением попытки измерен на одном Windows-ПК, не на любой системе.</a:t>
+            </a:r>
+          </a:p>
+          <a:p>
+            <a:r>
+              <a:t>Переход: «Что уже можно пройти и что ещё впереди.»</a:t>
             </a:r>
           </a:p>
         </p:txBody>
@@ -1493,27 +1483,17 @@
           <a:lstStyle/>
           <a:p>
             <a:r>
-              <a:t>5:05–5:35. Не начинайте питч с «у нас нет AI». Здесь — честная граница после показанной ценности.</a:t>
-            </a:r>
-          </a:p>
-          <a:p>
-            <a:r>
-              <a:t>Guided — рабочий продукт: выбор, последствия, объяснение, повтор.</a:t>
-            </a:r>
-          </a:p>
-          <a:p>
-            <a:r>
-              <a:t>Скачанный чекпоинт или обучение на другом компьютере не равны встроенной возможности.</a:t>
-            </a:r>
-          </a:p>
-          <a:p>
-            <a:r>
-              <a:t>Если спросят про Qwen: планируем свободнее вести диалог на тех же правилах сделки. Пока игрок выбирает действие из списка.</a:t>
-            </a:r>
-          </a:p>
-          <a:p>
-            <a:r>
-              <a:t>Переход: «Готовы показать прототип и откуда брать материалы.»</a:t>
+              <a:t>4:55–5:20. Граница после показанной ценности, не открытие питча.</a:t>
+            </a:r>
+          </a:p>
+          <a:p>
+            <a:r>
+              <a:t>Сейчас игрок выбирает действие из списка. Свободный текст и Qwen — следующий этап, не текущая возможность. Скачанная модель сама по себе продукт не включает.</a:t>
+            </a:r>
+          </a:p>
+          <a:p>
+            <a:r>
+              <a:t>Переход: «Давайте пройдём прототип.»</a:t>
             </a:r>
           </a:p>
         </p:txBody>
@@ -5756,7 +5736,7 @@
         <p:spPr>
           <a:xfrm>
             <a:off x="411480" y="420624"/>
-            <a:ext cx="11338560" cy="868680"/>
+            <a:ext cx="11338560" cy="777240"/>
           </a:xfrm>
           <a:prstGeom prst="rect">
             <a:avLst/>
@@ -5784,7 +5764,7 @@
                 <a:ea typeface="Segoe UI"/>
                 <a:cs typeface="Segoe UI"/>
               </a:rPr>
-              <a:t>Прототип можно пройти: настройка, переговоры, разбор</a:t>
+              <a:t>Пройдите прототип: настройка, переговоры, разбор</a:t>
             </a:r>
           </a:p>
         </p:txBody>
@@ -5797,8 +5777,8 @@
         </p:nvSpPr>
         <p:spPr>
           <a:xfrm>
-            <a:off x="411480" y="1417320"/>
-            <a:ext cx="6675120" cy="822960"/>
+            <a:off x="411480" y="1371600"/>
+            <a:ext cx="11338560" cy="640080"/>
           </a:xfrm>
           <a:prstGeom prst="rect">
             <a:avLst/>
@@ -5826,7 +5806,7 @@
                 <a:ea typeface="Calibri"/>
                 <a:cs typeface="Calibri"/>
               </a:rPr>
-              <a:t>Отрепетируйте сложный разговор до реальной встречи — на этой машине, в guided-режиме, без ключей.</a:t>
+              <a:t>Отрепетируйте сложный разговор до реальной встречи. Выбор действий, без ключей и без модели.</a:t>
             </a:r>
           </a:p>
         </p:txBody>
@@ -5839,8 +5819,8 @@
         </p:nvSpPr>
         <p:spPr>
           <a:xfrm>
-            <a:off x="411480" y="2286000"/>
-            <a:ext cx="6675120" cy="3840480"/>
+            <a:off x="411480" y="2194560"/>
+            <a:ext cx="6858000" cy="3931920"/>
           </a:xfrm>
           <a:prstGeom prst="roundRect">
             <a:avLst>
@@ -5886,8 +5866,8 @@
         </p:nvSpPr>
         <p:spPr>
           <a:xfrm>
-            <a:off x="640080" y="2468880"/>
-            <a:ext cx="6263640" cy="320040"/>
+            <a:off x="640080" y="2377440"/>
+            <a:ext cx="6446520" cy="365760"/>
           </a:xfrm>
           <a:prstGeom prst="rect">
             <a:avLst/>
@@ -5915,7 +5895,7 @@
                 <a:ea typeface="Segoe UI"/>
                 <a:cs typeface="Segoe UI"/>
               </a:rPr>
-              <a:t>Что открыть</a:t>
+              <a:t>Материалы для жюри</a:t>
             </a:r>
           </a:p>
         </p:txBody>
@@ -5929,7 +5909,7 @@
         <p:spPr>
           <a:xfrm>
             <a:off x="640080" y="2880360"/>
-            <a:ext cx="6263640" cy="3017520"/>
+            <a:ext cx="6446520" cy="640080"/>
           </a:xfrm>
           <a:prstGeom prst="rect">
             <a:avLst/>
@@ -5949,7 +5929,7 @@
               </a:spcAft>
             </a:pPr>
             <a:r>
-              <a:rPr sz="1500" b="0">
+              <a:rPr sz="1600" b="0">
                 <a:solidFill>
                   <a:srgbClr val="203240"/>
                 </a:solidFill>
@@ -5957,27 +5937,106 @@
                 <a:ea typeface="Calibri"/>
                 <a:cs typeface="Calibri"/>
               </a:rPr>
-              <a:t>Презентация: docs/submission/TALKNFACE_PRODUCT_PITCH_RU.pptx
-Вход рецензента: docs/submission/README.md
-Показ 3–5 мин: docs/DEMO_GUIDE_RU.md
-Код приложения: feature/app-qwen-independent-01
-Эта поставка слайдов: docs/organizer-presentation-01
-Репозиторий сейчас закрыт для анонимного чтения:
-нужны права или ZIP владельца.</a:t>
-            </a:r>
-          </a:p>
-        </p:txBody>
-      </p:sp>
-      <p:sp>
-        <p:nvSpPr>
-          <p:cNvPr id="9" name="Rounded Rectangle 8"/>
+              <a:t>Одна страница: исходники, запуск, презентация и описание продукта.</a:t>
+            </a:r>
+          </a:p>
+        </p:txBody>
+      </p:sp>
+      <p:sp>
+        <p:nvSpPr>
+          <p:cNvPr id="9" name="TextBox 8"/>
+          <p:cNvSpPr txBox="1"/>
+          <p:nvPr/>
+        </p:nvSpPr>
+        <p:spPr>
+          <a:xfrm>
+            <a:off x="640080" y="3566160"/>
+            <a:ext cx="6446520" cy="411480"/>
+          </a:xfrm>
+          <a:prstGeom prst="rect">
+            <a:avLst/>
+          </a:prstGeom>
+          <a:noFill/>
+        </p:spPr>
+        <p:txBody>
+          <a:bodyPr wrap="square"/>
+          <a:lstStyle/>
+          <a:p>
+            <a:pPr algn="l">
+              <a:spcBef>
+                <a:spcPts val="0"/>
+              </a:spcBef>
+              <a:spcAft>
+                <a:spcPts val="0"/>
+              </a:spcAft>
+            </a:pPr>
+            <a:r>
+              <a:rPr sz="1800" b="1">
+                <a:solidFill>
+                  <a:srgbClr val="17695E"/>
+                </a:solidFill>
+                <a:latin typeface="Segoe UI"/>
+                <a:ea typeface="Segoe UI"/>
+                <a:cs typeface="Segoe UI"/>
+                <a:hlinkClick r:id="rId2"/>
+              </a:rPr>
+              <a:t>Открыть страницу материалов</a:t>
+            </a:r>
+          </a:p>
+        </p:txBody>
+      </p:sp>
+      <p:sp>
+        <p:nvSpPr>
+          <p:cNvPr id="10" name="TextBox 9"/>
+          <p:cNvSpPr txBox="1"/>
+          <p:nvPr/>
+        </p:nvSpPr>
+        <p:spPr>
+          <a:xfrm>
+            <a:off x="640080" y="4114800"/>
+            <a:ext cx="6446520" cy="1645920"/>
+          </a:xfrm>
+          <a:prstGeom prst="rect">
+            <a:avLst/>
+          </a:prstGeom>
+          <a:noFill/>
+        </p:spPr>
+        <p:txBody>
+          <a:bodyPr wrap="square"/>
+          <a:lstStyle/>
+          <a:p>
+            <a:pPr algn="l">
+              <a:spcBef>
+                <a:spcPts val="0"/>
+              </a:spcBef>
+              <a:spcAft>
+                <a:spcPts val="0"/>
+              </a:spcAft>
+            </a:pPr>
+            <a:r>
+              <a:rPr sz="1500" b="0">
+                <a:solidFill>
+                  <a:srgbClr val="586B72"/>
+                </a:solidFill>
+                <a:latin typeface="Calibri"/>
+                <a:ea typeface="Calibri"/>
+                <a:cs typeface="Calibri"/>
+              </a:rPr>
+              <a:t>Ссылка ведёт в репозиторий. Анонимно он сейчас не открывается: нужен доступ владельца или ZIP. Это не публичный сайт продукта.</a:t>
+            </a:r>
+          </a:p>
+        </p:txBody>
+      </p:sp>
+      <p:sp>
+        <p:nvSpPr>
+          <p:cNvPr id="11" name="Rounded Rectangle 10"/>
           <p:cNvSpPr/>
           <p:nvPr/>
         </p:nvSpPr>
         <p:spPr>
           <a:xfrm>
-            <a:off x="7269480" y="2286000"/>
-            <a:ext cx="4480560" cy="3840480"/>
+            <a:off x="7452360" y="2194560"/>
+            <a:ext cx="4297680" cy="3931920"/>
           </a:xfrm>
           <a:prstGeom prst="roundRect">
             <a:avLst>
@@ -6015,14 +6074,14 @@
       </p:sp>
       <p:sp>
         <p:nvSpPr>
-          <p:cNvPr id="10" name="TextBox 9"/>
-          <p:cNvSpPr txBox="1"/>
-          <p:nvPr/>
-        </p:nvSpPr>
-        <p:spPr>
-          <a:xfrm>
-            <a:off x="7498079" y="2468880"/>
-            <a:ext cx="4069080" cy="365760"/>
+          <p:cNvPr id="12" name="TextBox 11"/>
+          <p:cNvSpPr txBox="1"/>
+          <p:nvPr/>
+        </p:nvSpPr>
+        <p:spPr>
+          <a:xfrm>
+            <a:off x="7680960" y="2423160"/>
+            <a:ext cx="3886200" cy="640080"/>
           </a:xfrm>
           <a:prstGeom prst="rect">
             <a:avLst/>
@@ -6050,21 +6109,21 @@
                 <a:ea typeface="Segoe UI"/>
                 <a:cs typeface="Segoe UI"/>
               </a:rPr>
-              <a:t>Запуск на Windows</a:t>
-            </a:r>
-          </a:p>
-        </p:txBody>
-      </p:sp>
-      <p:sp>
-        <p:nvSpPr>
-          <p:cNvPr id="11" name="TextBox 10"/>
-          <p:cNvSpPr txBox="1"/>
-          <p:nvPr/>
-        </p:nvSpPr>
-        <p:spPr>
-          <a:xfrm>
-            <a:off x="7498079" y="2926080"/>
-            <a:ext cx="4069080" cy="2926080"/>
+              <a:t>После запуска на этом компьютере</a:t>
+            </a:r>
+          </a:p>
+        </p:txBody>
+      </p:sp>
+      <p:sp>
+        <p:nvSpPr>
+          <p:cNvPr id="13" name="TextBox 12"/>
+          <p:cNvSpPr txBox="1"/>
+          <p:nvPr/>
+        </p:nvSpPr>
+        <p:spPr>
+          <a:xfrm>
+            <a:off x="7680960" y="3200400"/>
+            <a:ext cx="3886200" cy="2377440"/>
           </a:xfrm>
           <a:prstGeom prst="rect">
             <a:avLst/>
@@ -6084,7 +6143,7 @@
               </a:spcAft>
             </a:pPr>
             <a:r>
-              <a:rPr sz="1600" b="0">
+              <a:rPr sz="1800" b="0">
                 <a:solidFill>
                   <a:srgbClr val="FFFFFF"/>
                 </a:solidFill>
@@ -6092,19 +6151,17 @@
                 <a:ea typeface="Calibri"/>
                 <a:cs typeface="Calibri"/>
               </a:rPr>
-              <a:t>Prepare
-Start -Port 3100
-Stop
-http://127.0.0.1:3100/admin
-Это локальный контур, не сайт.
-Пароль задаёте вы. Модель не нужна.</a:t>
-            </a:r>
-          </a:p>
-        </p:txBody>
-      </p:sp>
-      <p:sp>
-        <p:nvSpPr>
-          <p:cNvPr id="12" name="TextBox 11"/>
+              <a:t>127.0.0.1:3100/admin
+Только здесь, не удалённое демо.
+Свой пароль.
+Модель не нужна.</a:t>
+            </a:r>
+          </a:p>
+        </p:txBody>
+      </p:sp>
+      <p:sp>
+        <p:nvSpPr>
+          <p:cNvPr id="14" name="TextBox 13"/>
           <p:cNvSpPr txBox="1"/>
           <p:nvPr/>
         </p:nvSpPr>
@@ -6146,7 +6203,7 @@
       </p:sp>
       <p:sp>
         <p:nvSpPr>
-          <p:cNvPr id="13" name="TextBox 12"/>
+          <p:cNvPr id="15" name="TextBox 14"/>
           <p:cNvSpPr txBox="1"/>
           <p:nvPr/>
         </p:nvSpPr>
@@ -6868,7 +6925,7 @@
                 <a:ea typeface="Calibri"/>
                 <a:cs typeface="Calibri"/>
               </a:rPr>
-              <a:t>Настройки → публикация → подготовка → ветвящиеся ходы → исход → разбор → replay.</a:t>
+              <a:t>Настройки, публикация, подготовка, ходы, исход, разбор, повторная попытка.</a:t>
             </a:r>
           </a:p>
         </p:txBody>
@@ -7580,7 +7637,7 @@
                 <a:ea typeface="Calibri"/>
                 <a:cs typeface="Calibri"/>
               </a:rPr>
-              <a:t>Локальный Windows-контур по инструкции. Публичной ссылки нет.</a:t>
+              <a:t>Локальный запуск на Windows по инструкции. Публичной ссылки нет.</a:t>
             </a:r>
           </a:p>
         </p:txBody>
@@ -7758,7 +7815,7 @@
                 <a:ea typeface="Calibri"/>
                 <a:cs typeface="Calibri"/>
               </a:rPr>
-              <a:t>Guided без AI. Свободный диалог и публичный хостинг — следующие шаги.</a:t>
+              <a:t>Выбор действий, без AI. Свободный диалог — следующий шаг.</a:t>
             </a:r>
           </a:p>
         </p:txBody>
@@ -8519,7 +8576,7 @@
                 <a:ea typeface="Calibri"/>
                 <a:cs typeface="Calibri"/>
               </a:rPr>
-              <a:t>Локальный SQLite. Нет регистрации игрока. Чужой идентификатор попытку не открывает. Это loopback, не GDPR-аудит.</a:t>
+              <a:t>Локальная база. Регистрации игрока нет. Чужой адрес попытку не открывает. Это локальный запуск, не публичный сайт.</a:t>
             </a:r>
           </a:p>
         </p:txBody>
@@ -8781,7 +8838,7 @@
                 <a:ea typeface="Calibri"/>
                 <a:cs typeface="Calibri"/>
               </a:rPr>
-              <a:t>Linux/macOS, другой браузер, публичный HTTPS, чужой ПК жюри, качество модели.</a:t>
+              <a:t>Linux и macOS, другой браузер, публичный сайт, чужой компьютер жюри, качество модели.</a:t>
             </a:r>
           </a:p>
         </p:txBody>
@@ -10880,7 +10937,7 @@
         <p:spPr>
           <a:xfrm>
             <a:off x="411480" y="420624"/>
-            <a:ext cx="11338560" cy="868680"/>
+            <a:ext cx="11338560" cy="640080"/>
           </a:xfrm>
           <a:prstGeom prst="rect">
             <a:avLst/>
@@ -10900,7 +10957,7 @@
               </a:spcAft>
             </a:pPr>
             <a:r>
-              <a:rPr sz="2800" b="1">
+              <a:rPr sz="2600" b="1">
                 <a:solidFill>
                   <a:srgbClr val="183331"/>
                 </a:solidFill>
@@ -10915,14 +10972,56 @@
       </p:sp>
       <p:sp>
         <p:nvSpPr>
-          <p:cNvPr id="5" name="Rounded Rectangle 4"/>
+          <p:cNvPr id="5" name="TextBox 4"/>
+          <p:cNvSpPr txBox="1"/>
+          <p:nvPr/>
+        </p:nvSpPr>
+        <p:spPr>
+          <a:xfrm>
+            <a:off x="411480" y="1115568"/>
+            <a:ext cx="11338560" cy="502920"/>
+          </a:xfrm>
+          <a:prstGeom prst="rect">
+            <a:avLst/>
+          </a:prstGeom>
+          <a:noFill/>
+        </p:spPr>
+        <p:txBody>
+          <a:bodyPr wrap="square"/>
+          <a:lstStyle/>
+          <a:p>
+            <a:pPr algn="l">
+              <a:spcBef>
+                <a:spcPts val="0"/>
+              </a:spcBef>
+              <a:spcAft>
+                <a:spcPts val="0"/>
+              </a:spcAft>
+            </a:pPr>
+            <a:r>
+              <a:rPr sz="1400" b="0">
+                <a:solidFill>
+                  <a:srgbClr val="586B72"/>
+                </a:solidFill>
+                <a:latin typeface="Calibri"/>
+                <a:ea typeface="Calibri"/>
+                <a:cs typeface="Calibri"/>
+              </a:rPr>
+              <a:t>Обе попытки — неизменённый эталон «Закупка к запуску»: обычная сложность, нейтральный тон, директор продаж, оборотные средства. Живой показ использует другую, настроенную версию.</a:t>
+            </a:r>
+          </a:p>
+        </p:txBody>
+      </p:sp>
+      <p:sp>
+        <p:nvSpPr>
+          <p:cNvPr id="6" name="Rounded Rectangle 5"/>
           <p:cNvSpPr/>
           <p:nvPr/>
         </p:nvSpPr>
         <p:spPr>
           <a:xfrm>
-            <a:off x="411480" y="1417320"/>
-            <a:ext cx="5577840" cy="4709160"/>
+            <a:off x="411480" y="1737360"/>
+            <a:ext cx="5577840" cy="4480560"/>
           </a:xfrm>
           <a:prstGeom prst="roundRect">
             <a:avLst>
@@ -10962,14 +11061,14 @@
       </p:sp>
       <p:sp>
         <p:nvSpPr>
-          <p:cNvPr id="6" name="Rectangle 5"/>
+          <p:cNvPr id="7" name="Rectangle 6"/>
           <p:cNvSpPr/>
           <p:nvPr/>
         </p:nvSpPr>
         <p:spPr>
           <a:xfrm>
-            <a:off x="411480" y="1417320"/>
-            <a:ext cx="5577840" cy="109728"/>
+            <a:off x="411480" y="1737360"/>
+            <a:ext cx="5577840" cy="91440"/>
           </a:xfrm>
           <a:prstGeom prst="rect">
             <a:avLst/>
@@ -11005,13 +11104,13 @@
       </p:sp>
       <p:sp>
         <p:nvSpPr>
-          <p:cNvPr id="7" name="TextBox 6"/>
-          <p:cNvSpPr txBox="1"/>
-          <p:nvPr/>
-        </p:nvSpPr>
-        <p:spPr>
-          <a:xfrm>
-            <a:off x="640080" y="1691640"/>
+          <p:cNvPr id="8" name="TextBox 7"/>
+          <p:cNvSpPr txBox="1"/>
+          <p:nvPr/>
+        </p:nvSpPr>
+        <p:spPr>
+          <a:xfrm>
+            <a:off x="640080" y="1965960"/>
             <a:ext cx="5120640" cy="365760"/>
           </a:xfrm>
           <a:prstGeom prst="rect">
@@ -11040,21 +11139,21 @@
                 <a:ea typeface="Segoe UI"/>
                 <a:cs typeface="Segoe UI"/>
               </a:rPr>
-              <a:t>Попытка А. Сначала слушает</a:t>
-            </a:r>
-          </a:p>
-        </p:txBody>
-      </p:sp>
-      <p:sp>
-        <p:nvSpPr>
-          <p:cNvPr id="8" name="TextBox 7"/>
-          <p:cNvSpPr txBox="1"/>
-          <p:nvPr/>
-        </p:nvSpPr>
-        <p:spPr>
-          <a:xfrm>
-            <a:off x="640080" y="2194560"/>
-            <a:ext cx="5120640" cy="1554480"/>
+              <a:t>А. Сначала слушает</a:t>
+            </a:r>
+          </a:p>
+        </p:txBody>
+      </p:sp>
+      <p:sp>
+        <p:nvSpPr>
+          <p:cNvPr id="9" name="TextBox 8"/>
+          <p:cNvSpPr txBox="1"/>
+          <p:nvPr/>
+        </p:nvSpPr>
+        <p:spPr>
+          <a:xfrm>
+            <a:off x="640080" y="2423160"/>
+            <a:ext cx="5120640" cy="1417320"/>
           </a:xfrm>
           <a:prstGeom prst="rect">
             <a:avLst/>
@@ -11082,21 +11181,21 @@
                 <a:ea typeface="Calibri"/>
                 <a:cs typeface="Calibri"/>
               </a:rPr>
-              <a:t>Вопрос о логистике → признаёт экономию на разделении партии → логистический довод → вопрос об оплате → пакет 95 / 40% на день 7, остаток на 14 / предоплата 50%.</a:t>
-            </a:r>
-          </a:p>
-        </p:txBody>
-      </p:sp>
-      <p:sp>
-        <p:nvSpPr>
-          <p:cNvPr id="9" name="Rounded Rectangle 8"/>
+              <a:t>Вопрос о логистике, признание экономии, довод, вопрос об оплате. Затем пакет: 95 / 40% на день 7, остаток на 14 / предоплата 50%.</a:t>
+            </a:r>
+          </a:p>
+        </p:txBody>
+      </p:sp>
+      <p:sp>
+        <p:nvSpPr>
+          <p:cNvPr id="10" name="Rounded Rectangle 9"/>
           <p:cNvSpPr/>
           <p:nvPr/>
         </p:nvSpPr>
         <p:spPr>
           <a:xfrm>
-            <a:off x="640080" y="3886200"/>
-            <a:ext cx="5074920" cy="1920240"/>
+            <a:off x="640080" y="4023360"/>
+            <a:ext cx="5074920" cy="1874519"/>
           </a:xfrm>
           <a:prstGeom prst="roundRect">
             <a:avLst>
@@ -11136,13 +11235,13 @@
       </p:sp>
       <p:sp>
         <p:nvSpPr>
-          <p:cNvPr id="10" name="TextBox 9"/>
-          <p:cNvSpPr txBox="1"/>
-          <p:nvPr/>
-        </p:nvSpPr>
-        <p:spPr>
-          <a:xfrm>
-            <a:off x="822960" y="4069080"/>
+          <p:cNvPr id="11" name="TextBox 10"/>
+          <p:cNvSpPr txBox="1"/>
+          <p:nvPr/>
+        </p:nvSpPr>
+        <p:spPr>
+          <a:xfrm>
+            <a:off x="822960" y="4160520"/>
             <a:ext cx="4754880" cy="1600200"/>
           </a:xfrm>
           <a:prstGeom prst="rect">
@@ -11171,23 +11270,22 @@
                 <a:ea typeface="Calibri"/>
                 <a:cs typeface="Calibri"/>
               </a:rPr>
-              <a:t>Соглашение.
-Учебная полезность 64 — выше цели 62 и альтернативы 55.
-Процесс: 100 из 100 по 7 применимым проверкам.</a:t>
-            </a:r>
-          </a:p>
-        </p:txBody>
-      </p:sp>
-      <p:sp>
-        <p:nvSpPr>
-          <p:cNvPr id="11" name="Rounded Rectangle 10"/>
+              <a:t>Соглашение. Полезность 64 — выше цели 62 и альтернативы 55.
+Процесс 100 по 7 применимым проверкам.</a:t>
+            </a:r>
+          </a:p>
+        </p:txBody>
+      </p:sp>
+      <p:sp>
+        <p:nvSpPr>
+          <p:cNvPr id="12" name="Rounded Rectangle 11"/>
           <p:cNvSpPr/>
           <p:nvPr/>
         </p:nvSpPr>
         <p:spPr>
           <a:xfrm>
-            <a:off x="6172200" y="1417320"/>
-            <a:ext cx="5577840" cy="4709160"/>
+            <a:off x="6172200" y="1737360"/>
+            <a:ext cx="5577840" cy="4480560"/>
           </a:xfrm>
           <a:prstGeom prst="roundRect">
             <a:avLst>
@@ -11227,14 +11325,14 @@
       </p:sp>
       <p:sp>
         <p:nvSpPr>
-          <p:cNvPr id="12" name="Rectangle 11"/>
+          <p:cNvPr id="13" name="Rectangle 12"/>
           <p:cNvSpPr/>
           <p:nvPr/>
         </p:nvSpPr>
         <p:spPr>
           <a:xfrm>
-            <a:off x="6172200" y="1417320"/>
-            <a:ext cx="5577840" cy="109728"/>
+            <a:off x="6172200" y="1737360"/>
+            <a:ext cx="5577840" cy="91440"/>
           </a:xfrm>
           <a:prstGeom prst="rect">
             <a:avLst/>
@@ -11270,13 +11368,13 @@
       </p:sp>
       <p:sp>
         <p:nvSpPr>
-          <p:cNvPr id="13" name="TextBox 12"/>
-          <p:cNvSpPr txBox="1"/>
-          <p:nvPr/>
-        </p:nvSpPr>
-        <p:spPr>
-          <a:xfrm>
-            <a:off x="6400800" y="1691640"/>
+          <p:cNvPr id="14" name="TextBox 13"/>
+          <p:cNvSpPr txBox="1"/>
+          <p:nvPr/>
+        </p:nvSpPr>
+        <p:spPr>
+          <a:xfrm>
+            <a:off x="6400800" y="1965960"/>
             <a:ext cx="5120640" cy="365760"/>
           </a:xfrm>
           <a:prstGeom prst="rect">
@@ -11305,21 +11403,21 @@
                 <a:ea typeface="Segoe UI"/>
                 <a:cs typeface="Segoe UI"/>
               </a:rPr>
-              <a:t>Попытка Б. Сначала предлагает</a:t>
-            </a:r>
-          </a:p>
-        </p:txBody>
-      </p:sp>
-      <p:sp>
-        <p:nvSpPr>
-          <p:cNvPr id="14" name="TextBox 13"/>
-          <p:cNvSpPr txBox="1"/>
-          <p:nvPr/>
-        </p:nvSpPr>
-        <p:spPr>
-          <a:xfrm>
-            <a:off x="6400800" y="2194560"/>
-            <a:ext cx="5120640" cy="1554480"/>
+              <a:t>Б. Предлагает и выходит</a:t>
+            </a:r>
+          </a:p>
+        </p:txBody>
+      </p:sp>
+      <p:sp>
+        <p:nvSpPr>
+          <p:cNvPr id="15" name="TextBox 14"/>
+          <p:cNvSpPr txBox="1"/>
+          <p:nvPr/>
+        </p:nvSpPr>
+        <p:spPr>
+          <a:xfrm>
+            <a:off x="6400800" y="2423160"/>
+            <a:ext cx="5120640" cy="1417320"/>
           </a:xfrm>
           <a:prstGeom prst="rect">
             <a:avLst/>
@@ -11347,21 +11445,21 @@
                 <a:ea typeface="Calibri"/>
                 <a:cs typeface="Calibri"/>
               </a:rPr>
-              <a:t>Тот же взаимный пакет уходит первым ходом, затем вопросы и выход без сделки. Конфигурация та же: закупка, плановая поставка, обычная сложность, дружелюбный тон, директор, доходность.</a:t>
-            </a:r>
-          </a:p>
-        </p:txBody>
-      </p:sp>
-      <p:sp>
-        <p:nvSpPr>
-          <p:cNvPr id="15" name="Rounded Rectangle 14"/>
+              <a:t>Тот же пакет — первым ходом, затем вопросы. Игрок сам выбирает выход без сделки.</a:t>
+            </a:r>
+          </a:p>
+        </p:txBody>
+      </p:sp>
+      <p:sp>
+        <p:nvSpPr>
+          <p:cNvPr id="16" name="Rounded Rectangle 15"/>
           <p:cNvSpPr/>
           <p:nvPr/>
         </p:nvSpPr>
         <p:spPr>
           <a:xfrm>
-            <a:off x="6400800" y="3886200"/>
-            <a:ext cx="5074920" cy="1920240"/>
+            <a:off x="6400800" y="4023360"/>
+            <a:ext cx="5074920" cy="1874519"/>
           </a:xfrm>
           <a:prstGeom prst="roundRect">
             <a:avLst>
@@ -11401,13 +11499,13 @@
       </p:sp>
       <p:sp>
         <p:nvSpPr>
-          <p:cNvPr id="16" name="TextBox 15"/>
-          <p:cNvSpPr txBox="1"/>
-          <p:nvPr/>
-        </p:nvSpPr>
-        <p:spPr>
-          <a:xfrm>
-            <a:off x="6583680" y="4069080"/>
+          <p:cNvPr id="17" name="TextBox 16"/>
+          <p:cNvSpPr txBox="1"/>
+          <p:nvPr/>
+        </p:nvSpPr>
+        <p:spPr>
+          <a:xfrm>
+            <a:off x="6583680" y="4160520"/>
             <a:ext cx="4754880" cy="1600200"/>
           </a:xfrm>
           <a:prstGeom prst="rect">
@@ -11436,16 +11534,15 @@
                 <a:ea typeface="Calibri"/>
                 <a:cs typeface="Calibri"/>
               </a:rPr>
-              <a:t>Соглашения нет. Полезности сделки нет.
-Процесс: 70 — зачёт за взаимный пакет сохраняется.
-Отказ — не провал процесса. Баллы не вычитаем как «рост навыка».</a:t>
-            </a:r>
-          </a:p>
-        </p:txBody>
-      </p:sp>
-      <p:sp>
-        <p:nvSpPr>
-          <p:cNvPr id="17" name="TextBox 16"/>
+              <a:t>Соглашения нет. Процесс 70: зачёт за взаимный пакет остаётся.
+Это выбор выхода, не рост навыка.</a:t>
+            </a:r>
+          </a:p>
+        </p:txBody>
+      </p:sp>
+      <p:sp>
+        <p:nvSpPr>
+          <p:cNvPr id="18" name="TextBox 17"/>
           <p:cNvSpPr txBox="1"/>
           <p:nvPr/>
         </p:nvSpPr>
@@ -11487,7 +11584,7 @@
       </p:sp>
       <p:sp>
         <p:nvSpPr>
-          <p:cNvPr id="18" name="TextBox 17"/>
+          <p:cNvPr id="19" name="TextBox 18"/>
           <p:cNvSpPr txBox="1"/>
           <p:nvPr/>
         </p:nvSpPr>
@@ -12330,7 +12427,7 @@
                 <a:ea typeface="Calibri"/>
                 <a:cs typeface="Calibri"/>
               </a:rPr>
-              <a:t>Когда оппонент раскрывает интерес и насколько жёстко принимает пакет. Всегда 8 ходов.</a:t>
+              <a:t>Когда оппонент раскрывает интерес и насколько жёстко принимает пакет. До 8 ходов.</a:t>
             </a:r>
           </a:p>
         </p:txBody>
@@ -12932,7 +13029,7 @@
         <p:spPr>
           <a:xfrm>
             <a:off x="411480" y="420624"/>
-            <a:ext cx="11338560" cy="822960"/>
+            <a:ext cx="11338560" cy="640080"/>
           </a:xfrm>
           <a:prstGeom prst="rect">
             <a:avLst/>
@@ -12952,7 +13049,7 @@
               </a:spcAft>
             </a:pPr>
             <a:r>
-              <a:rPr sz="2700" b="1">
+              <a:rPr sz="2600" b="1">
                 <a:solidFill>
                   <a:srgbClr val="183331"/>
                 </a:solidFill>
@@ -12965,40 +13062,16 @@
           </a:p>
         </p:txBody>
       </p:sp>
-      <p:pic>
-        <p:nvPicPr>
-          <p:cNvPr id="5" name="Picture 4" descr="process100.png"/>
-          <p:cNvPicPr>
-            <a:picLocks noChangeAspect="1"/>
-          </p:cNvPicPr>
-          <p:nvPr/>
-        </p:nvPicPr>
-        <p:blipFill>
-          <a:blip r:embed="rId2"/>
-          <a:stretch>
-            <a:fillRect/>
-          </a:stretch>
-        </p:blipFill>
-        <p:spPr>
-          <a:xfrm>
-            <a:off x="746439" y="1417320"/>
-            <a:ext cx="2576200" cy="4892040"/>
-          </a:xfrm>
-          <a:prstGeom prst="rect">
-            <a:avLst/>
-          </a:prstGeom>
-        </p:spPr>
-      </p:pic>
-      <p:sp>
-        <p:nvSpPr>
-          <p:cNvPr id="6" name="Rounded Rectangle 5"/>
+      <p:sp>
+        <p:nvSpPr>
+          <p:cNvPr id="5" name="Rounded Rectangle 4"/>
           <p:cNvSpPr/>
           <p:nvPr/>
         </p:nvSpPr>
         <p:spPr>
           <a:xfrm>
-            <a:off x="3840480" y="1417320"/>
-            <a:ext cx="3977639" cy="2240280"/>
+            <a:off x="411480" y="1280160"/>
+            <a:ext cx="4709160" cy="4983480"/>
           </a:xfrm>
           <a:prstGeom prst="roundRect">
             <a:avLst>
@@ -13036,100 +13109,40 @@
           </a:p>
         </p:txBody>
       </p:sp>
-      <p:sp>
-        <p:nvSpPr>
-          <p:cNvPr id="7" name="TextBox 6"/>
-          <p:cNvSpPr txBox="1"/>
-          <p:nvPr/>
-        </p:nvSpPr>
-        <p:spPr>
-          <a:xfrm>
-            <a:off x="4023360" y="1554480"/>
-            <a:ext cx="3657600" cy="365760"/>
-          </a:xfrm>
-          <a:prstGeom prst="rect">
-            <a:avLst/>
-          </a:prstGeom>
-          <a:noFill/>
-        </p:spPr>
-        <p:txBody>
-          <a:bodyPr wrap="square"/>
-          <a:lstStyle/>
-          <a:p>
-            <a:pPr algn="l">
-              <a:spcBef>
-                <a:spcPts val="0"/>
-              </a:spcBef>
-              <a:spcAft>
-                <a:spcPts val="0"/>
-              </a:spcAft>
-            </a:pPr>
-            <a:r>
-              <a:rPr sz="1600" b="1">
-                <a:solidFill>
-                  <a:srgbClr val="183331"/>
-                </a:solidFill>
-                <a:latin typeface="Segoe UI"/>
-                <a:ea typeface="Segoe UI"/>
-                <a:cs typeface="Segoe UI"/>
-              </a:rPr>
-              <a:t>Сделка ≠ процесс</a:t>
-            </a:r>
-          </a:p>
-        </p:txBody>
-      </p:sp>
-      <p:sp>
-        <p:nvSpPr>
-          <p:cNvPr id="8" name="TextBox 7"/>
-          <p:cNvSpPr txBox="1"/>
-          <p:nvPr/>
-        </p:nvSpPr>
-        <p:spPr>
-          <a:xfrm>
-            <a:off x="4023360" y="1965960"/>
-            <a:ext cx="3657600" cy="1463040"/>
-          </a:xfrm>
-          <a:prstGeom prst="rect">
-            <a:avLst/>
-          </a:prstGeom>
-          <a:noFill/>
-        </p:spPr>
-        <p:txBody>
-          <a:bodyPr wrap="square"/>
-          <a:lstStyle/>
-          <a:p>
-            <a:pPr algn="l">
-              <a:spcBef>
-                <a:spcPts val="0"/>
-              </a:spcBef>
-              <a:spcAft>
-                <a:spcPts val="0"/>
-              </a:spcAft>
-            </a:pPr>
-            <a:r>
-              <a:rPr sz="1400" b="0">
-                <a:solidFill>
-                  <a:srgbClr val="203240"/>
-                </a:solidFill>
-                <a:latin typeface="Calibri"/>
-                <a:ea typeface="Calibri"/>
-                <a:cs typeface="Calibri"/>
-              </a:rPr>
-              <a:t>Полезность сделки — про пакет. Балл процесса — про записанные действия учебной модели. 100 из 100 — не «100% компетентности переговорщика».</a:t>
-            </a:r>
-          </a:p>
-        </p:txBody>
-      </p:sp>
-      <p:sp>
-        <p:nvSpPr>
-          <p:cNvPr id="9" name="Rounded Rectangle 8"/>
+      <p:pic>
+        <p:nvPicPr>
+          <p:cNvPr id="6" name="Picture 5" descr="evidence.png"/>
+          <p:cNvPicPr>
+            <a:picLocks noChangeAspect="1"/>
+          </p:cNvPicPr>
+          <p:nvPr/>
+        </p:nvPicPr>
+        <p:blipFill>
+          <a:blip r:embed="rId2"/>
+          <a:stretch>
+            <a:fillRect/>
+          </a:stretch>
+        </p:blipFill>
+        <p:spPr>
+          <a:xfrm>
+            <a:off x="1050013" y="1389888"/>
+            <a:ext cx="3432093" cy="4754880"/>
+          </a:xfrm>
+          <a:prstGeom prst="rect">
+            <a:avLst/>
+          </a:prstGeom>
+        </p:spPr>
+      </p:pic>
+      <p:sp>
+        <p:nvSpPr>
+          <p:cNvPr id="7" name="Rounded Rectangle 6"/>
           <p:cNvSpPr/>
           <p:nvPr/>
         </p:nvSpPr>
         <p:spPr>
           <a:xfrm>
-            <a:off x="7955279" y="1417320"/>
-            <a:ext cx="3794760" cy="2240280"/>
+            <a:off x="5303520" y="1280160"/>
+            <a:ext cx="6446520" cy="1554480"/>
           </a:xfrm>
           <a:prstGeom prst="roundRect">
             <a:avLst>
@@ -13169,14 +13182,14 @@
       </p:sp>
       <p:sp>
         <p:nvSpPr>
-          <p:cNvPr id="10" name="TextBox 9"/>
-          <p:cNvSpPr txBox="1"/>
-          <p:nvPr/>
-        </p:nvSpPr>
-        <p:spPr>
-          <a:xfrm>
-            <a:off x="8138160" y="1554480"/>
-            <a:ext cx="3474720" cy="365760"/>
+          <p:cNvPr id="8" name="TextBox 7"/>
+          <p:cNvSpPr txBox="1"/>
+          <p:nvPr/>
+        </p:nvSpPr>
+        <p:spPr>
+          <a:xfrm>
+            <a:off x="5486400" y="1389888"/>
+            <a:ext cx="6080760" cy="320040"/>
           </a:xfrm>
           <a:prstGeom prst="rect">
             <a:avLst/>
@@ -13204,21 +13217,21 @@
                 <a:ea typeface="Segoe UI"/>
                 <a:cs typeface="Segoe UI"/>
               </a:rPr>
-              <a:t>Плохое соглашение</a:t>
-            </a:r>
-          </a:p>
-        </p:txBody>
-      </p:sp>
-      <p:sp>
-        <p:nvSpPr>
-          <p:cNvPr id="11" name="TextBox 10"/>
-          <p:cNvSpPr txBox="1"/>
-          <p:nvPr/>
-        </p:nvSpPr>
-        <p:spPr>
-          <a:xfrm>
-            <a:off x="8138160" y="1965960"/>
-            <a:ext cx="3474720" cy="1463040"/>
+              <a:t>Сделка и процесс — разные вещи</a:t>
+            </a:r>
+          </a:p>
+        </p:txBody>
+      </p:sp>
+      <p:sp>
+        <p:nvSpPr>
+          <p:cNvPr id="9" name="TextBox 8"/>
+          <p:cNvSpPr txBox="1"/>
+          <p:nvPr/>
+        </p:nvSpPr>
+        <p:spPr>
+          <a:xfrm>
+            <a:off x="5486400" y="1783080"/>
+            <a:ext cx="6080760" cy="914400"/>
           </a:xfrm>
           <a:prstGeom prst="rect">
             <a:avLst/>
@@ -13238,7 +13251,7 @@
               </a:spcAft>
             </a:pPr>
             <a:r>
-              <a:rPr sz="1400" b="0">
+              <a:rPr sz="1500" b="0">
                 <a:solidFill>
                   <a:srgbClr val="203240"/>
                 </a:solidFill>
@@ -13246,21 +13259,21 @@
                 <a:ea typeface="Calibri"/>
                 <a:cs typeface="Calibri"/>
               </a:rPr>
-              <a:t>S2, урезанный пакет: соглашение слабое, полезность 20, процесс 44.12. Отношения и подготовка могут быть зачтены, аргументация — нет.</a:t>
-            </a:r>
-          </a:p>
-        </p:txBody>
-      </p:sp>
-      <p:sp>
-        <p:nvSpPr>
-          <p:cNvPr id="12" name="Rounded Rectangle 11"/>
+              <a:t>Полезность — про пакет. Балл процесса — про записанные действия. 100 из 100 — не компетентность человека.</a:t>
+            </a:r>
+          </a:p>
+        </p:txBody>
+      </p:sp>
+      <p:sp>
+        <p:nvSpPr>
+          <p:cNvPr id="10" name="Rounded Rectangle 9"/>
           <p:cNvSpPr/>
           <p:nvPr/>
         </p:nvSpPr>
         <p:spPr>
           <a:xfrm>
-            <a:off x="3840480" y="3794760"/>
-            <a:ext cx="3977639" cy="2514600"/>
+            <a:off x="5303520" y="2971800"/>
+            <a:ext cx="6446520" cy="1417320"/>
           </a:xfrm>
           <a:prstGeom prst="roundRect">
             <a:avLst>
@@ -13298,40 +13311,16 @@
           </a:p>
         </p:txBody>
       </p:sp>
-      <p:pic>
-        <p:nvPicPr>
-          <p:cNvPr id="13" name="Picture 12" descr="insufficient.png"/>
-          <p:cNvPicPr>
-            <a:picLocks noChangeAspect="1"/>
-          </p:cNvPicPr>
-          <p:nvPr/>
-        </p:nvPicPr>
-        <p:blipFill>
-          <a:blip r:embed="rId3"/>
-          <a:stretch>
-            <a:fillRect/>
-          </a:stretch>
-        </p:blipFill>
-        <p:spPr>
-          <a:xfrm>
-            <a:off x="4068931" y="3931920"/>
-            <a:ext cx="1371897" cy="2240280"/>
-          </a:xfrm>
-          <a:prstGeom prst="rect">
-            <a:avLst/>
-          </a:prstGeom>
-        </p:spPr>
-      </p:pic>
-      <p:sp>
-        <p:nvSpPr>
-          <p:cNvPr id="14" name="TextBox 13"/>
-          <p:cNvSpPr txBox="1"/>
-          <p:nvPr/>
-        </p:nvSpPr>
-        <p:spPr>
-          <a:xfrm>
-            <a:off x="5623560" y="4023360"/>
-            <a:ext cx="2011680" cy="2103120"/>
+      <p:sp>
+        <p:nvSpPr>
+          <p:cNvPr id="11" name="TextBox 10"/>
+          <p:cNvSpPr txBox="1"/>
+          <p:nvPr/>
+        </p:nvSpPr>
+        <p:spPr>
+          <a:xfrm>
+            <a:off x="5486400" y="3081528"/>
+            <a:ext cx="6080760" cy="320040"/>
           </a:xfrm>
           <a:prstGeom prst="rect">
             <a:avLst/>
@@ -13351,7 +13340,49 @@
               </a:spcAft>
             </a:pPr>
             <a:r>
-              <a:rPr sz="1400" b="0">
+              <a:rPr sz="1600" b="1">
+                <a:solidFill>
+                  <a:srgbClr val="183331"/>
+                </a:solidFill>
+                <a:latin typeface="Segoe UI"/>
+                <a:ea typeface="Segoe UI"/>
+                <a:cs typeface="Segoe UI"/>
+              </a:rPr>
+              <a:t>Слабое соглашение</a:t>
+            </a:r>
+          </a:p>
+        </p:txBody>
+      </p:sp>
+      <p:sp>
+        <p:nvSpPr>
+          <p:cNvPr id="12" name="TextBox 11"/>
+          <p:cNvSpPr txBox="1"/>
+          <p:nvPr/>
+        </p:nvSpPr>
+        <p:spPr>
+          <a:xfrm>
+            <a:off x="5486400" y="3456432"/>
+            <a:ext cx="6080760" cy="777240"/>
+          </a:xfrm>
+          <a:prstGeom prst="rect">
+            <a:avLst/>
+          </a:prstGeom>
+          <a:noFill/>
+        </p:spPr>
+        <p:txBody>
+          <a:bodyPr wrap="square"/>
+          <a:lstStyle/>
+          <a:p>
+            <a:pPr algn="l">
+              <a:spcBef>
+                <a:spcPts val="0"/>
+              </a:spcBef>
+              <a:spcAft>
+                <a:spcPts val="0"/>
+              </a:spcAft>
+            </a:pPr>
+            <a:r>
+              <a:rPr sz="1500" b="0">
                 <a:solidFill>
                   <a:srgbClr val="203240"/>
                 </a:solidFill>
@@ -13359,21 +13390,21 @@
                 <a:ea typeface="Calibri"/>
                 <a:cs typeface="Calibri"/>
               </a:rPr>
-              <a:t>Мало ходов или нет подготовки — «Недостаточно наблюдений». Приложение не выдумывает общий балл.</a:t>
-            </a:r>
-          </a:p>
-        </p:txBody>
-      </p:sp>
-      <p:sp>
-        <p:nvSpPr>
-          <p:cNvPr id="15" name="Rounded Rectangle 14"/>
+              <a:t>В нагрузке команды урезанный пакет: полезность 20, процесс 44.12. Подготовка может быть зачтена, аргументация — нет.</a:t>
+            </a:r>
+          </a:p>
+        </p:txBody>
+      </p:sp>
+      <p:sp>
+        <p:nvSpPr>
+          <p:cNvPr id="13" name="Rounded Rectangle 12"/>
           <p:cNvSpPr/>
           <p:nvPr/>
         </p:nvSpPr>
         <p:spPr>
           <a:xfrm>
-            <a:off x="7955279" y="3794760"/>
-            <a:ext cx="3794760" cy="2514600"/>
+            <a:off x="5303520" y="4526280"/>
+            <a:ext cx="6446520" cy="1737360"/>
           </a:xfrm>
           <a:prstGeom prst="roundRect">
             <a:avLst>
@@ -13413,14 +13444,14 @@
       </p:sp>
       <p:sp>
         <p:nvSpPr>
-          <p:cNvPr id="16" name="TextBox 15"/>
-          <p:cNvSpPr txBox="1"/>
-          <p:nvPr/>
-        </p:nvSpPr>
-        <p:spPr>
-          <a:xfrm>
-            <a:off x="8138160" y="3977639"/>
-            <a:ext cx="3474720" cy="365760"/>
+          <p:cNvPr id="14" name="TextBox 13"/>
+          <p:cNvSpPr txBox="1"/>
+          <p:nvPr/>
+        </p:nvSpPr>
+        <p:spPr>
+          <a:xfrm>
+            <a:off x="5486400" y="4636008"/>
+            <a:ext cx="6080760" cy="320040"/>
           </a:xfrm>
           <a:prstGeom prst="rect">
             <a:avLst/>
@@ -13455,14 +13486,14 @@
       </p:sp>
       <p:sp>
         <p:nvSpPr>
-          <p:cNvPr id="17" name="TextBox 16"/>
-          <p:cNvSpPr txBox="1"/>
-          <p:nvPr/>
-        </p:nvSpPr>
-        <p:spPr>
-          <a:xfrm>
-            <a:off x="8138160" y="4389120"/>
-            <a:ext cx="3474720" cy="1691640"/>
+          <p:cNvPr id="15" name="TextBox 14"/>
+          <p:cNvSpPr txBox="1"/>
+          <p:nvPr/>
+        </p:nvSpPr>
+        <p:spPr>
+          <a:xfrm>
+            <a:off x="5486400" y="5010912"/>
+            <a:ext cx="6080760" cy="1097280"/>
           </a:xfrm>
           <a:prstGeom prst="rect">
             <a:avLst/>
@@ -13482,7 +13513,7 @@
               </a:spcAft>
             </a:pPr>
             <a:r>
-              <a:rPr sz="1400" b="0">
+              <a:rPr sz="1500" b="0">
                 <a:solidFill>
                   <a:srgbClr val="203240"/>
                 </a:solidFill>
@@ -13490,14 +13521,14 @@
                 <a:ea typeface="Calibri"/>
                 <a:cs typeface="Calibri"/>
               </a:rPr>
-              <a:t>Рекомендация привязана к проваленной проверке и предлагается как альтернатива. Она не обещает, что оппонент согласится.</a:t>
-            </a:r>
-          </a:p>
-        </p:txBody>
-      </p:sp>
-      <p:sp>
-        <p:nvSpPr>
-          <p:cNvPr id="18" name="TextBox 17"/>
+              <a:t>Совет привязан к непройденной проверке и не обещает согласия. Мало ходов или нет подготовки — «Недостаточно наблюдений», общего балла нет.</a:t>
+            </a:r>
+          </a:p>
+        </p:txBody>
+      </p:sp>
+      <p:sp>
+        <p:nvSpPr>
+          <p:cNvPr id="16" name="TextBox 15"/>
           <p:cNvSpPr txBox="1"/>
           <p:nvPr/>
         </p:nvSpPr>
@@ -13539,7 +13570,7 @@
       </p:sp>
       <p:sp>
         <p:nvSpPr>
-          <p:cNvPr id="19" name="TextBox 18"/>
+          <p:cNvPr id="17" name="TextBox 16"/>
           <p:cNvSpPr txBox="1"/>
           <p:nvPr/>
         </p:nvSpPr>
@@ -14075,7 +14106,7 @@
                 <a:ea typeface="Segoe UI"/>
                 <a:cs typeface="Segoe UI"/>
               </a:rPr>
-              <a:t>Администратор / наставник</a:t>
+              <a:t>Администратор и наставник</a:t>
             </a:r>
           </a:p>
         </p:txBody>
@@ -14117,7 +14148,7 @@
                 <a:ea typeface="Calibri"/>
                 <a:cs typeface="Calibri"/>
               </a:rPr>
-              <a:t>Готовит занятие, не играет оппонента</a:t>
+              <a:t>Готовят занятие, не играют оппонента</a:t>
             </a:r>
           </a:p>
         </p:txBody>
@@ -14159,7 +14190,7 @@
                 <a:ea typeface="Calibri"/>
                 <a:cs typeface="Calibri"/>
               </a:rPr>
-              <a:t>Шесть настроек, проверка достижимости, публикация, разбор по действиям ученика. Дополняет тренера, не заменяет его.</a:t>
+              <a:t>Администратор публикует ситуацию. Отчёт видит сам игрок. Наставник разбирает его вместе с игроком, на экране игрока.</a:t>
             </a:r>
           </a:p>
         </p:txBody>
@@ -15363,8 +15394,8 @@
         </p:nvSpPr>
         <p:spPr>
           <a:xfrm>
-            <a:off x="411480" y="4023360"/>
-            <a:ext cx="11338560" cy="2194560"/>
+            <a:off x="411480" y="4069080"/>
+            <a:ext cx="11338560" cy="2148840"/>
           </a:xfrm>
           <a:prstGeom prst="roundRect">
             <a:avLst>
@@ -15410,7 +15441,7 @@
         </p:nvSpPr>
         <p:spPr>
           <a:xfrm>
-            <a:off x="640080" y="4160520"/>
+            <a:off x="640080" y="4251960"/>
             <a:ext cx="10972800" cy="320040"/>
           </a:xfrm>
           <a:prstGeom prst="rect">
@@ -15452,7 +15483,7 @@
         </p:nvSpPr>
         <p:spPr>
           <a:xfrm>
-            <a:off x="640080" y="4526280"/>
+            <a:off x="640080" y="4663440"/>
             <a:ext cx="10972800" cy="640080"/>
           </a:xfrm>
           <a:prstGeom prst="rect">
@@ -15481,7 +15512,7 @@
                 <a:ea typeface="Calibri"/>
                 <a:cs typeface="Calibri"/>
               </a:rPr>
-              <a:t>Можно спорить с решением, открыв ход. Нельзя получить другой исход из тех же сохранённых действий «потому что модель передумала».</a:t>
+              <a:t>Можно открыть ход и сверить вывод. Те же сохранённые действия на той же версии не меняют исход сами по себе.</a:t>
             </a:r>
           </a:p>
         </p:txBody>
@@ -15494,8 +15525,8 @@
         </p:nvSpPr>
         <p:spPr>
           <a:xfrm>
-            <a:off x="640080" y="5212080"/>
-            <a:ext cx="10972800" cy="731520"/>
+            <a:off x="640080" y="5394960"/>
+            <a:ext cx="10972800" cy="594360"/>
           </a:xfrm>
           <a:prstGeom prst="rect">
             <a:avLst/>
@@ -15523,7 +15554,7 @@
                 <a:ea typeface="Calibri"/>
                 <a:cs typeface="Calibri"/>
               </a:rPr>
-              <a:t>Стек (вторично): веб-приложение, Fastify и React, SQLite. Локальный показ на 127.0.0.1. После Stop/Start попытка сохраняется. Вход и владение сессией проверены на loopback HTTP — это не сертификат корпоративной безопасности и не публичный сайт.</a:t>
+              <a:t>Веб, Fastify, React, SQLite. Локальный запуск; остановка и новый старт сохраняют попытку. Это не публичный сайт.</a:t>
             </a:r>
           </a:p>
         </p:txBody>
@@ -15760,7 +15791,7 @@
                 <a:ea typeface="Segoe UI"/>
                 <a:cs typeface="Segoe UI"/>
               </a:rPr>
-              <a:t>Guided-цикл работает сейчас. Свободный диалог — впереди</a:t>
+              <a:t>Выбор действий работает сейчас. Свободный диалог — впереди</a:t>
             </a:r>
           </a:p>
         </p:txBody>
@@ -16407,7 +16438,7 @@
                 <a:ea typeface="Calibri"/>
                 <a:cs typeface="Calibri"/>
               </a:rPr>
-              <a:t>○  Качество адаптера Qwen отдельно не принято.</a:t>
+              <a:t>○  Модель Qwen ещё не встроена и не проверена.</a:t>
             </a:r>
           </a:p>
         </p:txBody>
@@ -16449,7 +16480,7 @@
                 <a:ea typeface="Calibri"/>
                 <a:cs typeface="Calibri"/>
               </a:rPr>
-              <a:t>○  Публичный HTTPS и чужая машина жюри — не сертифицированы.</a:t>
+              <a:t>○  Публичный сайт и запуск на чужом компьютере не проверялись.</a:t>
             </a:r>
           </a:p>
         </p:txBody>
